--- a/.lessons/59 Vendor Product And Related Features/9 Product Variant - Creating necessary files/1.pptx
+++ b/.lessons/59 Vendor Product And Related Features/9 Product Variant - Creating necessary files/1.pptx
@@ -271,7 +271,7 @@
           <a:p>
             <a:fld id="{3E102D2E-813C-461C-9963-687A650C48C0}" type="datetimeFigureOut">
               <a:rPr lang="en-US" smtClean="0"/>
-              <a:t>12/22/2025</a:t>
+              <a:t>12/23/2025</a:t>
             </a:fld>
             <a:endParaRPr lang="en-US"/>
           </a:p>
@@ -469,7 +469,7 @@
           <a:p>
             <a:fld id="{3E102D2E-813C-461C-9963-687A650C48C0}" type="datetimeFigureOut">
               <a:rPr lang="en-US" smtClean="0"/>
-              <a:t>12/22/2025</a:t>
+              <a:t>12/23/2025</a:t>
             </a:fld>
             <a:endParaRPr lang="en-US"/>
           </a:p>
@@ -677,7 +677,7 @@
           <a:p>
             <a:fld id="{3E102D2E-813C-461C-9963-687A650C48C0}" type="datetimeFigureOut">
               <a:rPr lang="en-US" smtClean="0"/>
-              <a:t>12/22/2025</a:t>
+              <a:t>12/23/2025</a:t>
             </a:fld>
             <a:endParaRPr lang="en-US"/>
           </a:p>
@@ -875,7 +875,7 @@
           <a:p>
             <a:fld id="{3E102D2E-813C-461C-9963-687A650C48C0}" type="datetimeFigureOut">
               <a:rPr lang="en-US" smtClean="0"/>
-              <a:t>12/22/2025</a:t>
+              <a:t>12/23/2025</a:t>
             </a:fld>
             <a:endParaRPr lang="en-US"/>
           </a:p>
@@ -1150,7 +1150,7 @@
           <a:p>
             <a:fld id="{3E102D2E-813C-461C-9963-687A650C48C0}" type="datetimeFigureOut">
               <a:rPr lang="en-US" smtClean="0"/>
-              <a:t>12/22/2025</a:t>
+              <a:t>12/23/2025</a:t>
             </a:fld>
             <a:endParaRPr lang="en-US"/>
           </a:p>
@@ -1415,7 +1415,7 @@
           <a:p>
             <a:fld id="{3E102D2E-813C-461C-9963-687A650C48C0}" type="datetimeFigureOut">
               <a:rPr lang="en-US" smtClean="0"/>
-              <a:t>12/22/2025</a:t>
+              <a:t>12/23/2025</a:t>
             </a:fld>
             <a:endParaRPr lang="en-US"/>
           </a:p>
@@ -1827,7 +1827,7 @@
           <a:p>
             <a:fld id="{3E102D2E-813C-461C-9963-687A650C48C0}" type="datetimeFigureOut">
               <a:rPr lang="en-US" smtClean="0"/>
-              <a:t>12/22/2025</a:t>
+              <a:t>12/23/2025</a:t>
             </a:fld>
             <a:endParaRPr lang="en-US"/>
           </a:p>
@@ -1968,7 +1968,7 @@
           <a:p>
             <a:fld id="{3E102D2E-813C-461C-9963-687A650C48C0}" type="datetimeFigureOut">
               <a:rPr lang="en-US" smtClean="0"/>
-              <a:t>12/22/2025</a:t>
+              <a:t>12/23/2025</a:t>
             </a:fld>
             <a:endParaRPr lang="en-US"/>
           </a:p>
@@ -2081,7 +2081,7 @@
           <a:p>
             <a:fld id="{3E102D2E-813C-461C-9963-687A650C48C0}" type="datetimeFigureOut">
               <a:rPr lang="en-US" smtClean="0"/>
-              <a:t>12/22/2025</a:t>
+              <a:t>12/23/2025</a:t>
             </a:fld>
             <a:endParaRPr lang="en-US"/>
           </a:p>
@@ -2392,7 +2392,7 @@
           <a:p>
             <a:fld id="{3E102D2E-813C-461C-9963-687A650C48C0}" type="datetimeFigureOut">
               <a:rPr lang="en-US" smtClean="0"/>
-              <a:t>12/22/2025</a:t>
+              <a:t>12/23/2025</a:t>
             </a:fld>
             <a:endParaRPr lang="en-US"/>
           </a:p>
@@ -2680,7 +2680,7 @@
           <a:p>
             <a:fld id="{3E102D2E-813C-461C-9963-687A650C48C0}" type="datetimeFigureOut">
               <a:rPr lang="en-US" smtClean="0"/>
-              <a:t>12/22/2025</a:t>
+              <a:t>12/23/2025</a:t>
             </a:fld>
             <a:endParaRPr lang="en-US"/>
           </a:p>
@@ -2921,7 +2921,7 @@
           <a:p>
             <a:fld id="{3E102D2E-813C-461C-9963-687A650C48C0}" type="datetimeFigureOut">
               <a:rPr lang="en-US" smtClean="0"/>
-              <a:t>12/22/2025</a:t>
+              <a:t>12/23/2025</a:t>
             </a:fld>
             <a:endParaRPr lang="en-US"/>
           </a:p>
@@ -4373,7 +4373,7 @@
         <p:spPr>
           <a:xfrm>
             <a:off x="0" y="0"/>
-            <a:ext cx="12192000" cy="355354"/>
+            <a:ext cx="12192000" cy="1555682"/>
           </a:xfrm>
           <a:prstGeom prst="rect">
             <a:avLst/>
@@ -4393,7 +4393,59 @@
               <a:buNone/>
             </a:pPr>
             <a:r>
-              <a:rPr kumimoji="0" lang="en-US" altLang="en-US" sz="1300" b="0" i="0" u="none" strike="noStrike" cap="none" normalizeH="0" baseline="0">
+              <a:rPr lang="en-US" altLang="en-US" sz="1300">
+                <a:latin typeface="Arial" panose="020B0604020202020204" pitchFamily="34" charset="0"/>
+              </a:rPr>
+              <a:t>sad</a:t>
+            </a:r>
+            <a:r>
+              <a:rPr lang="az-Latn-AZ" altLang="en-US" sz="1300">
+                <a:latin typeface="Arial" panose="020B0604020202020204" pitchFamily="34" charset="0"/>
+              </a:rPr>
+              <a:t>əcə index.blade.php faylını aç. </a:t>
+            </a:r>
+          </a:p>
+          <a:p>
+            <a:pPr>
+              <a:lnSpc>
+                <a:spcPct val="150000"/>
+              </a:lnSpc>
+              <a:buNone/>
+            </a:pPr>
+            <a:endParaRPr kumimoji="0" lang="az-Latn-AZ" altLang="en-US" sz="1300" b="0" i="0" u="none" strike="noStrike" cap="none" normalizeH="0" baseline="0">
+              <a:ln>
+                <a:noFill/>
+              </a:ln>
+              <a:solidFill>
+                <a:schemeClr val="tx1"/>
+              </a:solidFill>
+              <a:effectLst/>
+              <a:latin typeface="Arial" panose="020B0604020202020204" pitchFamily="34" charset="0"/>
+            </a:endParaRPr>
+          </a:p>
+          <a:p>
+            <a:pPr>
+              <a:lnSpc>
+                <a:spcPct val="150000"/>
+              </a:lnSpc>
+              <a:buNone/>
+            </a:pPr>
+            <a:r>
+              <a:rPr lang="az-Latn-AZ" altLang="en-US" sz="1300">
+                <a:latin typeface="Arial" panose="020B0604020202020204" pitchFamily="34" charset="0"/>
+              </a:rPr>
+              <a:t>create.blade.php və edit.blade.php faylında da hal hazırda</a:t>
+            </a:r>
+          </a:p>
+          <a:p>
+            <a:pPr>
+              <a:lnSpc>
+                <a:spcPct val="150000"/>
+              </a:lnSpc>
+              <a:buNone/>
+            </a:pPr>
+            <a:r>
+              <a:rPr kumimoji="0" lang="az-Latn-AZ" altLang="en-US" sz="1300" b="0" i="0" u="none" strike="noStrike" cap="none" normalizeH="0" baseline="0">
                 <a:ln>
                   <a:noFill/>
                 </a:ln>
@@ -4403,8 +4455,45 @@
                 <a:effectLst/>
                 <a:latin typeface="Arial" panose="020B0604020202020204" pitchFamily="34" charset="0"/>
               </a:rPr>
-              <a:t>.</a:t>
-            </a:r>
+              <a:t>əvvəlcədən elementləri yerləşdirmişəm ancaq növbəti</a:t>
+            </a:r>
+          </a:p>
+          <a:p>
+            <a:pPr>
+              <a:lnSpc>
+                <a:spcPct val="150000"/>
+              </a:lnSpc>
+              <a:buNone/>
+            </a:pPr>
+            <a:r>
+              <a:rPr kumimoji="0" lang="az-Latn-AZ" altLang="en-US" sz="1300" b="0" i="0" u="none" strike="noStrike" cap="none" normalizeH="0" baseline="0">
+                <a:ln>
+                  <a:noFill/>
+                </a:ln>
+                <a:solidFill>
+                  <a:schemeClr val="tx1"/>
+                </a:solidFill>
+                <a:effectLst/>
+                <a:latin typeface="Arial" panose="020B0604020202020204" pitchFamily="34" charset="0"/>
+              </a:rPr>
+              <a:t>dərsin mövzusu</a:t>
+            </a:r>
+            <a:r>
+              <a:rPr lang="az-Latn-AZ" altLang="en-US" sz="1300">
+                <a:latin typeface="Arial" panose="020B0604020202020204" pitchFamily="34" charset="0"/>
+              </a:rPr>
+              <a:t> olmalıdır bu.</a:t>
+            </a:r>
+            <a:endParaRPr kumimoji="0" lang="en-US" altLang="en-US" sz="1300" b="0" i="0" u="none" strike="noStrike" cap="none" normalizeH="0" baseline="0">
+              <a:ln>
+                <a:noFill/>
+              </a:ln>
+              <a:solidFill>
+                <a:schemeClr val="tx1"/>
+              </a:solidFill>
+              <a:effectLst/>
+              <a:latin typeface="Arial" panose="020B0604020202020204" pitchFamily="34" charset="0"/>
+            </a:endParaRPr>
           </a:p>
         </p:txBody>
       </p:sp>
